--- a/lessons-v2/day04/day04.pptx
+++ b/lessons-v2/day04/day04.pptx
@@ -25,9 +25,10 @@
     <p:sldId id="273" r:id="rId19"/>
     <p:sldId id="274" r:id="rId20"/>
     <p:sldId id="275" r:id="rId21"/>
+    <p:sldId id="276" r:id="rId22"/>
   </p:sldIdLst>
   <p:notesMasterIdLst>
-    <p:notesMasterId r:id="rId22"/>
+    <p:notesMasterId r:id="rId23"/>
   </p:notesMasterIdLst>
   <p:sldSz cx="12192000" cy="6858000"/>
   <p:notesSz cx="6858000" cy="12192000"/>
@@ -532,18 +533,27 @@
 00:04 The chain — the 7 steps (the day's map)                  3   │
 00:07 Step 1: DNS — names to numbers                           7   │ PART 1
 00:14 DO: dig / nslookup                                       4   │ (DNS+TCP+TLS,
-00:18 Step 2: TCP — the reliable phone call                    8   │  done by :40)
+00:18 Step 2: TCP — the reliable phone call                    8   │  done by :43)
 00:26 DO: watch the handshake in curl -v                       3   │
-00:29 Step 3: TLS — locking the line + what it does NOT give   9   ┘
-00:38 Step 4: HTTP — request slide + response slide           11   ┐
-00:49 DO: hand-craft an HTTP request (netcat / ps1)            6   │ PART 2
-00:55 Steps 5-6 render (1 line) + the chain diagram            3   │ (HTTP + attacks
-00:58 Attack &lt;-&gt; defence                                       9   │  + DevTools)
-01:07 DO: DevTools -&gt; Network on a real login                  6   │
-01:13 Wrap + homework                                          5   ┘
-CUT FIRST IF SHORT: the render/repeat slide (say one sentence); the UDP line; the netcat "do
-it now" (do a full read of curl -v instead); the "look-alike site" attack row.
+00:29 UDP — shout it and hope (live diagram)                   3   │
+00:32 Step 3: TLS — locking the line + what it does NOT give   9   ┘
+00:41 Step 4: HTTP — request slide + response slide           11   ┐
+00:52 DO: hand-craft an HTTP request (netcat / ps1)            6   │ PART 2
+00:58 Steps 5-6 render (1 line) + the chain diagram            3   │ (HTTP + attacks
+01:01 Attack &lt;-&gt; defence                                       9   │  + DevTools)
+01:10 DO: DevTools -&gt; Network on a real login                  6   │
+01:16 Wrap + homework                                          5   ┘
+With the UDP slide in, the MID-POINT GATE is minute 43; cut UDP and it is back to minute 40.
+CUT FIRST IF SHORT: the render/repeat slide (say one sentence); the UDP slide (one sentence on
+the TCP slide instead); the netcat "do it now" (do a full read of curl -v instead); the
+"look-alike site" attack row.
 NEVER CUT: the DNS-&gt;TCP-&gt;TLS-&gt;HTTP order, what TLS does NOT give, the chain diagram, DevTools.
+LIVE DIAGRAMS (folder archify/ — open every file in its own browser tab BEFORE class; each has
+view buttons that step through the story, and a light/dark toggle for the projector):
+  04-page-load-chain.html -&gt; "The chain" slide (the map), and again at the whole-chain slide
+  01-dns-resolution.html  -&gt; Step 1 DNS
+  02-tcp-handshake.html   -&gt; Step 2 TCP
+  03-tcp-vs-udp.html      -&gt; UDP slide
 ANALOGY (sanctioned): the PHONE CALL. DNS = asking the operator / directory for the number.
 TCP handshake = "hello?… hello.… ok, go ahead." TLS = switching to a scrambler both ends share.
 HTTP = the actual conversation.</a:t>
@@ -589,6 +599,96 @@
 </file>
 
 <file path=ppt/notesSlides/notesSlide10.xml><?xml version="1.0" encoding="utf-8"?>
+<p:notes xmlns:a="http://schemas.openxmlformats.org/drawingml/2006/main" xmlns:r="http://schemas.openxmlformats.org/officeDocument/2006/relationships" xmlns:p="http://schemas.openxmlformats.org/presentationml/2006/main">
+  <p:cSld>
+    <p:spTree>
+      <p:nvGrpSpPr>
+        <p:cNvPr id="1" name=""/>
+        <p:cNvGrpSpPr/>
+        <p:nvPr/>
+      </p:nvGrpSpPr>
+      <p:grpSpPr>
+        <a:xfrm>
+          <a:off x="0" y="0"/>
+          <a:ext cx="0" cy="0"/>
+          <a:chOff x="0" y="0"/>
+          <a:chExt cx="0" cy="0"/>
+        </a:xfrm>
+      </p:grpSpPr>
+      <p:sp>
+        <p:nvSpPr>
+          <p:cNvPr id="2" name="Slide Image Placeholder 1"/>
+          <p:cNvSpPr>
+            <a:spLocks noGrp="1" noRot="1" noChangeAspect="1"/>
+          </p:cNvSpPr>
+          <p:nvPr>
+            <p:ph type="sldImg"/>
+          </p:nvPr>
+        </p:nvSpPr>
+        <p:spPr/>
+      </p:sp>
+      <p:sp>
+        <p:nvSpPr>
+          <p:cNvPr id="3" name="Notes Placeholder 2"/>
+          <p:cNvSpPr>
+            <a:spLocks noGrp="1"/>
+          </p:cNvSpPr>
+          <p:nvPr>
+            <p:ph type="body" idx="1"/>
+          </p:nvPr>
+        </p:nvSpPr>
+        <p:spPr/>
+        <p:txBody>
+          <a:bodyPr/>
+          <a:lstStyle/>
+          <a:p>
+            <a:r>
+              <a:rPr lang="en-US" dirty="0"/>
+              <a:t>Analogy: both ends switch on a scrambler only they can un-scramble; and the server shows ID
+before you trust it. Certificate detail is Day 5 — today just "a trusted third party vouched
+for this name."</a:t>
+            </a:r>
+            <a:endParaRPr lang="en-US" dirty="0"/>
+          </a:p>
+        </p:txBody>
+      </p:sp>
+      <p:sp>
+        <p:nvSpPr>
+          <p:cNvPr id="4" name="Slide Number Placeholder 3"/>
+          <p:cNvSpPr>
+            <a:spLocks noGrp="1"/>
+          </p:cNvSpPr>
+          <p:nvPr>
+            <p:ph type="sldNum" sz="quarter" idx="10"/>
+          </p:nvPr>
+        </p:nvSpPr>
+        <p:spPr/>
+        <p:txBody>
+          <a:bodyPr/>
+          <a:lstStyle/>
+          <a:p>
+            <a:fld id="{F7021451-1387-4CA6-816F-3879F97B5CBC}" type="slidenum">
+              <a:rPr lang="en-US"/>
+              <a:t>10</a:t>
+            </a:fld>
+            <a:endParaRPr lang="en-US"/>
+          </a:p>
+        </p:txBody>
+      </p:sp>
+    </p:spTree>
+    <p:extLst>
+      <p:ext uri="{BB962C8B-B14F-4D97-AF65-F5344CB8AC3E}">
+        <p14:creationId xmlns:p14="http://schemas.microsoft.com/office/powerpoint/2010/main" val="1024086991"/>
+      </p:ext>
+    </p:extLst>
+  </p:cSld>
+  <p:clrMapOvr>
+    <a:masterClrMapping/>
+  </p:clrMapOvr>
+</p:notes>
+</file>
+
+<file path=ppt/notesSlides/notesSlide11.xml><?xml version="1.0" encoding="utf-8"?>
 <p:notes xmlns:a="http://schemas.openxmlformats.org/drawingml/2006/main" xmlns:r="http://schemas.openxmlformats.org/officeDocument/2006/relationships" xmlns:p="http://schemas.openxmlformats.org/presentationml/2006/main">
   <p:cSld>
     <p:spTree>
@@ -659,7 +759,7 @@
           <a:p>
             <a:fld id="{F7021451-1387-4CA6-816F-3879F97B5CBC}" type="slidenum">
               <a:rPr lang="en-US"/>
-              <a:t>10</a:t>
+              <a:t>11</a:t>
             </a:fld>
             <a:endParaRPr lang="en-US"/>
           </a:p>
@@ -678,7 +778,7 @@
 </p:notes>
 </file>
 
-<file path=ppt/notesSlides/notesSlide11.xml><?xml version="1.0" encoding="utf-8"?>
+<file path=ppt/notesSlides/notesSlide12.xml><?xml version="1.0" encoding="utf-8"?>
 <p:notes xmlns:a="http://schemas.openxmlformats.org/drawingml/2006/main" xmlns:r="http://schemas.openxmlformats.org/officeDocument/2006/relationships" xmlns:p="http://schemas.openxmlformats.org/presentationml/2006/main">
   <p:cSld>
     <p:spTree>
@@ -749,7 +849,7 @@
           <a:p>
             <a:fld id="{F7021451-1387-4CA6-816F-3879F97B5CBC}" type="slidenum">
               <a:rPr lang="en-US"/>
-              <a:t>11</a:t>
+              <a:t>12</a:t>
             </a:fld>
             <a:endParaRPr lang="en-US"/>
           </a:p>
@@ -768,7 +868,7 @@
 </p:notes>
 </file>
 
-<file path=ppt/notesSlides/notesSlide12.xml><?xml version="1.0" encoding="utf-8"?>
+<file path=ppt/notesSlides/notesSlide13.xml><?xml version="1.0" encoding="utf-8"?>
 <p:notes xmlns:a="http://schemas.openxmlformats.org/drawingml/2006/main" xmlns:r="http://schemas.openxmlformats.org/officeDocument/2006/relationships" xmlns:p="http://schemas.openxmlformats.org/presentationml/2006/main">
   <p:cSld>
     <p:spTree>
@@ -838,7 +938,7 @@
           <a:p>
             <a:fld id="{F7021451-1387-4CA6-816F-3879F97B5CBC}" type="slidenum">
               <a:rPr lang="en-US"/>
-              <a:t>12</a:t>
+              <a:t>13</a:t>
             </a:fld>
             <a:endParaRPr lang="en-US"/>
           </a:p>
@@ -857,7 +957,7 @@
 </p:notes>
 </file>
 
-<file path=ppt/notesSlides/notesSlide13.xml><?xml version="1.0" encoding="utf-8"?>
+<file path=ppt/notesSlides/notesSlide14.xml><?xml version="1.0" encoding="utf-8"?>
 <p:notes xmlns:a="http://schemas.openxmlformats.org/drawingml/2006/main" xmlns:r="http://schemas.openxmlformats.org/officeDocument/2006/relationships" xmlns:p="http://schemas.openxmlformats.org/presentationml/2006/main">
   <p:cSld>
     <p:spTree>
@@ -930,7 +1030,7 @@
           <a:p>
             <a:fld id="{F7021451-1387-4CA6-816F-3879F97B5CBC}" type="slidenum">
               <a:rPr lang="en-US"/>
-              <a:t>13</a:t>
+              <a:t>14</a:t>
             </a:fld>
             <a:endParaRPr lang="en-US"/>
           </a:p>
@@ -949,7 +1049,7 @@
 </p:notes>
 </file>
 
-<file path=ppt/notesSlides/notesSlide14.xml><?xml version="1.0" encoding="utf-8"?>
+<file path=ppt/notesSlides/notesSlide15.xml><?xml version="1.0" encoding="utf-8"?>
 <p:notes xmlns:a="http://schemas.openxmlformats.org/drawingml/2006/main" xmlns:r="http://schemas.openxmlformats.org/officeDocument/2006/relationships" xmlns:p="http://schemas.openxmlformats.org/presentationml/2006/main">
   <p:cSld>
     <p:spTree>
@@ -1019,7 +1119,7 @@
           <a:p>
             <a:fld id="{F7021451-1387-4CA6-816F-3879F97B5CBC}" type="slidenum">
               <a:rPr lang="en-US"/>
-              <a:t>14</a:t>
+              <a:t>15</a:t>
             </a:fld>
             <a:endParaRPr lang="en-US"/>
           </a:p>
@@ -1038,7 +1138,7 @@
 </p:notes>
 </file>
 
-<file path=ppt/notesSlides/notesSlide15.xml><?xml version="1.0" encoding="utf-8"?>
+<file path=ppt/notesSlides/notesSlide16.xml><?xml version="1.0" encoding="utf-8"?>
 <p:notes xmlns:a="http://schemas.openxmlformats.org/drawingml/2006/main" xmlns:r="http://schemas.openxmlformats.org/officeDocument/2006/relationships" xmlns:p="http://schemas.openxmlformats.org/presentationml/2006/main">
   <p:cSld>
     <p:spTree>
@@ -1085,7 +1185,11 @@
             <a:r>
               <a:rPr lang="en-US" dirty="0"/>
               <a:t>Point at the board where the 6 steps have been ticked off all lesson. Tell them tonight's
-homework is the first draft of this; Friday's briefing turns it into the full assignment.</a:t>
+homework is the first draft of this; Friday's briefing turns it into the full assignment.
+LIVE DIAGRAM: archify/04-page-load-chain.html again — NOW click through the 4 views in order
+(find / connect + lock / talk / render + repeat). The "7 steps" card on the right is the
+assignment, word for word. Read the "Class check" card aloud — the padlock question is the
+Day 4 trap.</a:t>
             </a:r>
             <a:endParaRPr lang="en-US" dirty="0"/>
           </a:p>
@@ -1108,7 +1212,7 @@
           <a:p>
             <a:fld id="{F7021451-1387-4CA6-816F-3879F97B5CBC}" type="slidenum">
               <a:rPr lang="en-US"/>
-              <a:t>15</a:t>
+              <a:t>16</a:t>
             </a:fld>
             <a:endParaRPr lang="en-US"/>
           </a:p>
@@ -1127,7 +1231,7 @@
 </p:notes>
 </file>
 
-<file path=ppt/notesSlides/notesSlide16.xml><?xml version="1.0" encoding="utf-8"?>
+<file path=ppt/notesSlides/notesSlide17.xml><?xml version="1.0" encoding="utf-8"?>
 <p:notes xmlns:a="http://schemas.openxmlformats.org/drawingml/2006/main" xmlns:r="http://schemas.openxmlformats.org/officeDocument/2006/relationships" xmlns:p="http://schemas.openxmlformats.org/presentationml/2006/main">
   <p:cSld>
     <p:spTree>
@@ -1197,7 +1301,7 @@
           <a:p>
             <a:fld id="{F7021451-1387-4CA6-816F-3879F97B5CBC}" type="slidenum">
               <a:rPr lang="en-US"/>
-              <a:t>16</a:t>
+              <a:t>17</a:t>
             </a:fld>
             <a:endParaRPr lang="en-US"/>
           </a:p>
@@ -1216,7 +1320,7 @@
 </p:notes>
 </file>
 
-<file path=ppt/notesSlides/notesSlide17.xml><?xml version="1.0" encoding="utf-8"?>
+<file path=ppt/notesSlides/notesSlide18.xml><?xml version="1.0" encoding="utf-8"?>
 <p:notes xmlns:a="http://schemas.openxmlformats.org/drawingml/2006/main" xmlns:r="http://schemas.openxmlformats.org/officeDocument/2006/relationships" xmlns:p="http://schemas.openxmlformats.org/presentationml/2006/main">
   <p:cSld>
     <p:spTree>
@@ -1287,7 +1391,7 @@
           <a:p>
             <a:fld id="{F7021451-1387-4CA6-816F-3879F97B5CBC}" type="slidenum">
               <a:rPr lang="en-US"/>
-              <a:t>17</a:t>
+              <a:t>18</a:t>
             </a:fld>
             <a:endParaRPr lang="en-US"/>
           </a:p>
@@ -1306,7 +1410,7 @@
 </p:notes>
 </file>
 
-<file path=ppt/notesSlides/notesSlide18.xml><?xml version="1.0" encoding="utf-8"?>
+<file path=ppt/notesSlides/notesSlide19.xml><?xml version="1.0" encoding="utf-8"?>
 <p:notes xmlns:a="http://schemas.openxmlformats.org/drawingml/2006/main" xmlns:r="http://schemas.openxmlformats.org/officeDocument/2006/relationships" xmlns:p="http://schemas.openxmlformats.org/presentationml/2006/main">
   <p:cSld>
     <p:spTree>
@@ -1353,94 +1457,6 @@
             <a:r>
               <a:rPr lang="en-US" dirty="0"/>
               <a:t/>
-            </a:r>
-            <a:endParaRPr lang="en-US" dirty="0"/>
-          </a:p>
-        </p:txBody>
-      </p:sp>
-      <p:sp>
-        <p:nvSpPr>
-          <p:cNvPr id="4" name="Slide Number Placeholder 3"/>
-          <p:cNvSpPr>
-            <a:spLocks noGrp="1"/>
-          </p:cNvSpPr>
-          <p:nvPr>
-            <p:ph type="sldNum" sz="quarter" idx="10"/>
-          </p:nvPr>
-        </p:nvSpPr>
-        <p:spPr/>
-        <p:txBody>
-          <a:bodyPr/>
-          <a:lstStyle/>
-          <a:p>
-            <a:fld id="{F7021451-1387-4CA6-816F-3879F97B5CBC}" type="slidenum">
-              <a:rPr lang="en-US"/>
-              <a:t>18</a:t>
-            </a:fld>
-            <a:endParaRPr lang="en-US"/>
-          </a:p>
-        </p:txBody>
-      </p:sp>
-    </p:spTree>
-    <p:extLst>
-      <p:ext uri="{BB962C8B-B14F-4D97-AF65-F5344CB8AC3E}">
-        <p14:creationId xmlns:p14="http://schemas.microsoft.com/office/powerpoint/2010/main" val="1024086991"/>
-      </p:ext>
-    </p:extLst>
-  </p:cSld>
-  <p:clrMapOvr>
-    <a:masterClrMapping/>
-  </p:clrMapOvr>
-</p:notes>
-</file>
-
-<file path=ppt/notesSlides/notesSlide19.xml><?xml version="1.0" encoding="utf-8"?>
-<p:notes xmlns:a="http://schemas.openxmlformats.org/drawingml/2006/main" xmlns:r="http://schemas.openxmlformats.org/officeDocument/2006/relationships" xmlns:p="http://schemas.openxmlformats.org/presentationml/2006/main">
-  <p:cSld>
-    <p:spTree>
-      <p:nvGrpSpPr>
-        <p:cNvPr id="1" name=""/>
-        <p:cNvGrpSpPr/>
-        <p:nvPr/>
-      </p:nvGrpSpPr>
-      <p:grpSpPr>
-        <a:xfrm>
-          <a:off x="0" y="0"/>
-          <a:ext cx="0" cy="0"/>
-          <a:chOff x="0" y="0"/>
-          <a:chExt cx="0" cy="0"/>
-        </a:xfrm>
-      </p:grpSpPr>
-      <p:sp>
-        <p:nvSpPr>
-          <p:cNvPr id="2" name="Slide Image Placeholder 1"/>
-          <p:cNvSpPr>
-            <a:spLocks noGrp="1" noRot="1" noChangeAspect="1"/>
-          </p:cNvSpPr>
-          <p:nvPr>
-            <p:ph type="sldImg"/>
-          </p:nvPr>
-        </p:nvSpPr>
-        <p:spPr/>
-      </p:sp>
-      <p:sp>
-        <p:nvSpPr>
-          <p:cNvPr id="3" name="Notes Placeholder 2"/>
-          <p:cNvSpPr>
-            <a:spLocks noGrp="1"/>
-          </p:cNvSpPr>
-          <p:nvPr>
-            <p:ph type="body" idx="1"/>
-          </p:nvPr>
-        </p:nvSpPr>
-        <p:spPr/>
-        <p:txBody>
-          <a:bodyPr/>
-          <a:lstStyle/>
-          <a:p>
-            <a:r>
-              <a:rPr lang="en-US" dirty="0"/>
-              <a:t>Due start of Day 5. Day 5 (Friday) briefs the full weekend assignment.</a:t>
             </a:r>
             <a:endParaRPr lang="en-US" dirty="0"/>
           </a:p>
@@ -1617,6 +1633,94 @@
           <a:p>
             <a:r>
               <a:rPr lang="en-US" dirty="0"/>
+              <a:t>Due start of Day 5. Day 5 (Friday) briefs the full weekend assignment.</a:t>
+            </a:r>
+            <a:endParaRPr lang="en-US" dirty="0"/>
+          </a:p>
+        </p:txBody>
+      </p:sp>
+      <p:sp>
+        <p:nvSpPr>
+          <p:cNvPr id="4" name="Slide Number Placeholder 3"/>
+          <p:cNvSpPr>
+            <a:spLocks noGrp="1"/>
+          </p:cNvSpPr>
+          <p:nvPr>
+            <p:ph type="sldNum" sz="quarter" idx="10"/>
+          </p:nvPr>
+        </p:nvSpPr>
+        <p:spPr/>
+        <p:txBody>
+          <a:bodyPr/>
+          <a:lstStyle/>
+          <a:p>
+            <a:fld id="{F7021451-1387-4CA6-816F-3879F97B5CBC}" type="slidenum">
+              <a:rPr lang="en-US"/>
+              <a:t>20</a:t>
+            </a:fld>
+            <a:endParaRPr lang="en-US"/>
+          </a:p>
+        </p:txBody>
+      </p:sp>
+    </p:spTree>
+    <p:extLst>
+      <p:ext uri="{BB962C8B-B14F-4D97-AF65-F5344CB8AC3E}">
+        <p14:creationId xmlns:p14="http://schemas.microsoft.com/office/powerpoint/2010/main" val="1024086991"/>
+      </p:ext>
+    </p:extLst>
+  </p:cSld>
+  <p:clrMapOvr>
+    <a:masterClrMapping/>
+  </p:clrMapOvr>
+</p:notes>
+</file>
+
+<file path=ppt/notesSlides/notesSlide21.xml><?xml version="1.0" encoding="utf-8"?>
+<p:notes xmlns:a="http://schemas.openxmlformats.org/drawingml/2006/main" xmlns:r="http://schemas.openxmlformats.org/officeDocument/2006/relationships" xmlns:p="http://schemas.openxmlformats.org/presentationml/2006/main">
+  <p:cSld>
+    <p:spTree>
+      <p:nvGrpSpPr>
+        <p:cNvPr id="1" name=""/>
+        <p:cNvGrpSpPr/>
+        <p:nvPr/>
+      </p:nvGrpSpPr>
+      <p:grpSpPr>
+        <a:xfrm>
+          <a:off x="0" y="0"/>
+          <a:ext cx="0" cy="0"/>
+          <a:chOff x="0" y="0"/>
+          <a:chExt cx="0" cy="0"/>
+        </a:xfrm>
+      </p:grpSpPr>
+      <p:sp>
+        <p:nvSpPr>
+          <p:cNvPr id="2" name="Slide Image Placeholder 1"/>
+          <p:cNvSpPr>
+            <a:spLocks noGrp="1" noRot="1" noChangeAspect="1"/>
+          </p:cNvSpPr>
+          <p:nvPr>
+            <p:ph type="sldImg"/>
+          </p:nvPr>
+        </p:nvSpPr>
+        <p:spPr/>
+      </p:sp>
+      <p:sp>
+        <p:nvSpPr>
+          <p:cNvPr id="3" name="Notes Placeholder 2"/>
+          <p:cNvSpPr>
+            <a:spLocks noGrp="1"/>
+          </p:cNvSpPr>
+          <p:nvPr>
+            <p:ph type="body" idx="1"/>
+          </p:nvPr>
+        </p:nvSpPr>
+        <p:spPr/>
+        <p:txBody>
+          <a:bodyPr/>
+          <a:lstStyle/>
+          <a:p>
+            <a:r>
+              <a:rPr lang="en-US" dirty="0"/>
               <a:t>Say the three lines. Tomorrow: how the lock actually works — hashing, keys, certificates —
 and you'll crack a password hash yourself.</a:t>
             </a:r>
@@ -1641,7 +1745,7 @@
           <a:p>
             <a:fld id="{F7021451-1387-4CA6-816F-3879F97B5CBC}" type="slidenum">
               <a:rPr lang="en-US"/>
-              <a:t>20</a:t>
+              <a:t>21</a:t>
             </a:fld>
             <a:endParaRPr lang="en-US"/>
           </a:p>
@@ -1800,7 +1904,9 @@
             <a:r>
               <a:rPr lang="en-US" dirty="0"/>
               <a:t>This slide is the map for the whole day AND the shape of the assignment (7 steps). Put them on
-the board and tick them off as you go. Every web attack later "lives" on one of these steps.</a:t>
+the board and tick them off as you go. Every web attack later "lives" on one of these steps.
+LIVE DIAGRAM: archify/04-page-load-chain.html — play the trace once, no clicking through the
+views yet (60 seconds). "Five boxes. We do one at a time." Same tab comes back at :58.</a:t>
             </a:r>
             <a:endParaRPr lang="en-US" dirty="0"/>
           </a:p>
@@ -1891,7 +1997,10 @@
               <a:t>Analogy: asking the operator for a number. First time it's a few hops; after that everyone
 who asked recently has it memorised (cache).
 Keep it to: resolver -&gt; root -&gt; TLD -&gt; authoritative -&gt; answer, plus caching. No record-type
-zoo (A, AAAA, MX, TXT) beyond naming A = "name to IPv4".</a:t>
+zoo (A, AAAA, MX, TXT) beyond naming A = "name to IPv4".
+LIVE DIAGRAM: archify/01-dns-resolution.html — 3 views: ask the resolver / walk the tree /
+cache the answer. The must-land point is view 1: YOUR laptop does not walk the tree, the
+resolver does. The third "Class check" question sets up DNS spoofing on the attack slide.</a:t>
             </a:r>
             <a:endParaRPr lang="en-US" dirty="0"/>
           </a:p>
@@ -2069,8 +2178,11 @@
             <a:r>
               <a:rPr lang="en-US" dirty="0"/>
               <a:t>Analogy: "hello?… hello, I can hear you.… great, go ahead." Only after that do you talk.
-Contrast UDP in one line: no handshake, no re-sends — "shout it and hope." Used for DNS, video
-calls, games, where speed beats perfection. CUT the UDP line first if short.</a:t>
+LIVE DIAGRAM: archify/02-tcp-handshake.html — 3 views: handshake / numbered + acknowledged /
+a lost chunk. View 3 is the one the ASCII on this slide cannot show: chunk #2 vanishes, no
+ACK comes back, the sender re-sends. "That is the whole difference from IP."
+UDP gets its own slide after the "do it now". If you are cutting it: one line here — "UDP =
+no handshake, no re-sends, shout it and hope; DNS, video calls, games."</a:t>
             </a:r>
             <a:endParaRPr lang="en-US" dirty="0"/>
           </a:p>
@@ -2247,9 +2359,13 @@
           <a:p>
             <a:r>
               <a:rPr lang="en-US" dirty="0"/>
-              <a:t>Analogy: both ends switch on a scrambler only they can un-scramble; and the server shows ID
-before you trust it. Certificate detail is Day 5 — today just "a trusted third party vouched
-for this name."</a:t>
+              <a:t>LIVE DIAGRAM: archify/03-tcp-vs-udp.html — top row TCP, bottom row UDP, same sender and
+receiver. Play the trace: TCP goes through the handshake box first; UDP skips straight across.
+The two questions that make it land: "A bank page: TCP or UDP? Why?" and "Zoom dropped one
+frame — should it be re-sent?" (No: by the time it arrives it's old. Skip it.)
+Ask "why does DNS use UDP?" — one tiny question; a handshake would triple the wait.
+If asked about QUIC / HTTP/3: HTTP on top of UDP with reliability rebuilt on top (FAQ).
+CUT to one sentence on the TCP slide if short.</a:t>
             </a:r>
             <a:endParaRPr lang="en-US" dirty="0"/>
           </a:p>
@@ -3069,6 +3185,45 @@
 <file path=ppt/slides/slide20.xml><?xml version="1.0" encoding="utf-8"?>
 <p:sld xmlns:a="http://schemas.openxmlformats.org/drawingml/2006/main" xmlns:r="http://schemas.openxmlformats.org/officeDocument/2006/relationships" xmlns:p="http://schemas.openxmlformats.org/presentationml/2006/main">
   <p:cSld name="Slide 20">
+    <p:bg>
+      <p:bgPr>
+        <a:blipFill dpi="0" rotWithShape="1">
+          <a:blip r:embed="rId1">
+            <a:lum/>
+          </a:blip>
+          <a:srcRect/>
+          <a:stretch>
+            <a:fillRect/>
+          </a:stretch>
+        </a:blipFill>
+        <a:effectLst/>
+      </p:bgPr>
+    </p:bg>
+    <p:spTree>
+      <p:nvGrpSpPr>
+        <p:cNvPr id="1" name=""/>
+        <p:cNvGrpSpPr/>
+        <p:nvPr/>
+      </p:nvGrpSpPr>
+      <p:grpSpPr>
+        <a:xfrm>
+          <a:off x="0" y="0"/>
+          <a:ext cx="0" cy="0"/>
+          <a:chOff x="0" y="0"/>
+          <a:chExt cx="0" cy="0"/>
+        </a:xfrm>
+      </p:grpSpPr>
+    </p:spTree>
+  </p:cSld>
+  <p:clrMapOvr>
+    <a:masterClrMapping/>
+  </p:clrMapOvr>
+</p:sld>
+</file>
+
+<file path=ppt/slides/slide21.xml><?xml version="1.0" encoding="utf-8"?>
+<p:sld xmlns:a="http://schemas.openxmlformats.org/drawingml/2006/main" xmlns:r="http://schemas.openxmlformats.org/officeDocument/2006/relationships" xmlns:p="http://schemas.openxmlformats.org/presentationml/2006/main">
+  <p:cSld name="Slide 21">
     <p:bg>
       <p:bgPr>
         <a:blipFill dpi="0" rotWithShape="1">
